--- a/story4/story4.pptx
+++ b/story4/story4.pptx
@@ -109,6 +109,11 @@
       </a:defRPr>
     </a:lvl9pPr>
   </p:defaultTextStyle>
+  <p:extLst>
+    <p:ext uri="{EFAFB233-063F-42B5-8137-9DF3F51BA10A}">
+      <p15:sldGuideLst xmlns:p15="http://schemas.microsoft.com/office/powerpoint/2012/main"/>
+    </p:ext>
+  </p:extLst>
 </p:presentation>
 </file>
 
@@ -259,7 +264,7 @@
           <a:p>
             <a:fld id="{7286FF3B-15B1-5941-9BD3-EA1D120FD011}" type="datetimeFigureOut">
               <a:rPr lang="en-US" smtClean="0"/>
-              <a:t>3/22/26</a:t>
+              <a:t>3/23/26</a:t>
             </a:fld>
             <a:endParaRPr lang="en-US"/>
           </a:p>
@@ -457,7 +462,7 @@
           <a:p>
             <a:fld id="{7286FF3B-15B1-5941-9BD3-EA1D120FD011}" type="datetimeFigureOut">
               <a:rPr lang="en-US" smtClean="0"/>
-              <a:t>3/22/26</a:t>
+              <a:t>3/23/26</a:t>
             </a:fld>
             <a:endParaRPr lang="en-US"/>
           </a:p>
@@ -665,7 +670,7 @@
           <a:p>
             <a:fld id="{7286FF3B-15B1-5941-9BD3-EA1D120FD011}" type="datetimeFigureOut">
               <a:rPr lang="en-US" smtClean="0"/>
-              <a:t>3/22/26</a:t>
+              <a:t>3/23/26</a:t>
             </a:fld>
             <a:endParaRPr lang="en-US"/>
           </a:p>
@@ -863,7 +868,7 @@
           <a:p>
             <a:fld id="{7286FF3B-15B1-5941-9BD3-EA1D120FD011}" type="datetimeFigureOut">
               <a:rPr lang="en-US" smtClean="0"/>
-              <a:t>3/22/26</a:t>
+              <a:t>3/23/26</a:t>
             </a:fld>
             <a:endParaRPr lang="en-US"/>
           </a:p>
@@ -1138,7 +1143,7 @@
           <a:p>
             <a:fld id="{7286FF3B-15B1-5941-9BD3-EA1D120FD011}" type="datetimeFigureOut">
               <a:rPr lang="en-US" smtClean="0"/>
-              <a:t>3/22/26</a:t>
+              <a:t>3/23/26</a:t>
             </a:fld>
             <a:endParaRPr lang="en-US"/>
           </a:p>
@@ -1403,7 +1408,7 @@
           <a:p>
             <a:fld id="{7286FF3B-15B1-5941-9BD3-EA1D120FD011}" type="datetimeFigureOut">
               <a:rPr lang="en-US" smtClean="0"/>
-              <a:t>3/22/26</a:t>
+              <a:t>3/23/26</a:t>
             </a:fld>
             <a:endParaRPr lang="en-US"/>
           </a:p>
@@ -1815,7 +1820,7 @@
           <a:p>
             <a:fld id="{7286FF3B-15B1-5941-9BD3-EA1D120FD011}" type="datetimeFigureOut">
               <a:rPr lang="en-US" smtClean="0"/>
-              <a:t>3/22/26</a:t>
+              <a:t>3/23/26</a:t>
             </a:fld>
             <a:endParaRPr lang="en-US"/>
           </a:p>
@@ -1956,7 +1961,7 @@
           <a:p>
             <a:fld id="{7286FF3B-15B1-5941-9BD3-EA1D120FD011}" type="datetimeFigureOut">
               <a:rPr lang="en-US" smtClean="0"/>
-              <a:t>3/22/26</a:t>
+              <a:t>3/23/26</a:t>
             </a:fld>
             <a:endParaRPr lang="en-US"/>
           </a:p>
@@ -2069,7 +2074,7 @@
           <a:p>
             <a:fld id="{7286FF3B-15B1-5941-9BD3-EA1D120FD011}" type="datetimeFigureOut">
               <a:rPr lang="en-US" smtClean="0"/>
-              <a:t>3/22/26</a:t>
+              <a:t>3/23/26</a:t>
             </a:fld>
             <a:endParaRPr lang="en-US"/>
           </a:p>
@@ -2380,7 +2385,7 @@
           <a:p>
             <a:fld id="{7286FF3B-15B1-5941-9BD3-EA1D120FD011}" type="datetimeFigureOut">
               <a:rPr lang="en-US" smtClean="0"/>
-              <a:t>3/22/26</a:t>
+              <a:t>3/23/26</a:t>
             </a:fld>
             <a:endParaRPr lang="en-US"/>
           </a:p>
@@ -2668,7 +2673,7 @@
           <a:p>
             <a:fld id="{7286FF3B-15B1-5941-9BD3-EA1D120FD011}" type="datetimeFigureOut">
               <a:rPr lang="en-US" smtClean="0"/>
-              <a:t>3/22/26</a:t>
+              <a:t>3/23/26</a:t>
             </a:fld>
             <a:endParaRPr lang="en-US"/>
           </a:p>
@@ -2909,7 +2914,7 @@
           <a:p>
             <a:fld id="{7286FF3B-15B1-5941-9BD3-EA1D120FD011}" type="datetimeFigureOut">
               <a:rPr lang="en-US" smtClean="0"/>
-              <a:t>3/22/26</a:t>
+              <a:t>3/23/26</a:t>
             </a:fld>
             <a:endParaRPr lang="en-US"/>
           </a:p>
@@ -3505,12 +3510,14 @@
         </p:nvSpPr>
         <p:spPr>
           <a:xfrm>
-            <a:off x="838200" y="365126"/>
-            <a:ext cx="10515600" cy="895264"/>
+            <a:off x="838200" y="365125"/>
+            <a:ext cx="10515600" cy="991533"/>
           </a:xfrm>
         </p:spPr>
         <p:txBody>
-          <a:bodyPr/>
+          <a:bodyPr>
+            <a:normAutofit fontScale="90000"/>
+          </a:bodyPr>
           <a:lstStyle/>
           <a:p>
             <a:r>
@@ -3521,7 +3528,7 @@
                   </a:schemeClr>
                 </a:solidFill>
               </a:rPr>
-              <a:t>How Does Data Pay In The US</a:t>
+              <a:t>What do data jobs pay when compared to the national average pay?</a:t>
             </a:r>
           </a:p>
         </p:txBody>
@@ -3550,8 +3557,8 @@
         </p:blipFill>
         <p:spPr>
           <a:xfrm>
-            <a:off x="3772786" y="1860554"/>
-            <a:ext cx="6182444" cy="4351338"/>
+            <a:off x="4038599" y="1260390"/>
+            <a:ext cx="7699744" cy="5419247"/>
           </a:xfrm>
           <a:prstGeom prst="rect">
             <a:avLst/>
@@ -3572,8 +3579,8 @@
         </p:nvSpPr>
         <p:spPr>
           <a:xfrm>
-            <a:off x="838200" y="1260390"/>
-            <a:ext cx="2934586" cy="1754326"/>
+            <a:off x="388472" y="3231349"/>
+            <a:ext cx="4081928" cy="2031325"/>
           </a:xfrm>
           <a:prstGeom prst="rect">
             <a:avLst/>
@@ -3594,7 +3601,17 @@
                   </a:schemeClr>
                 </a:solidFill>
               </a:rPr>
-              <a:t>To analyze wages, SOC codes were collected from the BLS and assigned to four data related categories to aggregate data related salaries.</a:t>
+              <a:t>To analyze wages, SOC codes were collected from the Bureau of Labor Statistics and assigned </a:t>
+            </a:r>
+            <a:r>
+              <a:rPr lang="en-US" b="1" dirty="0">
+                <a:solidFill>
+                  <a:schemeClr val="bg2">
+                    <a:lumMod val="75000"/>
+                  </a:schemeClr>
+                </a:solidFill>
+              </a:rPr>
+              <a:t>to four data related job categories: Data Analytics, Data Science, Data Engineering, and Machine Learning/Advanced Research.</a:t>
             </a:r>
           </a:p>
         </p:txBody>
@@ -3635,58 +3652,12 @@
           <a:chExt cx="0" cy="0"/>
         </a:xfrm>
       </p:grpSpPr>
-      <p:sp>
-        <p:nvSpPr>
-          <p:cNvPr id="2" name="Title 1">
-            <a:extLst>
-              <a:ext uri="{FF2B5EF4-FFF2-40B4-BE49-F238E27FC236}">
-                <a16:creationId xmlns:a16="http://schemas.microsoft.com/office/drawing/2014/main" id="{7D73BB1F-24B8-9F17-DE83-E3C133DEF759}"/>
-              </a:ext>
-            </a:extLst>
-          </p:cNvPr>
-          <p:cNvSpPr>
-            <a:spLocks noGrp="1"/>
-          </p:cNvSpPr>
-          <p:nvPr>
-            <p:ph type="title"/>
-          </p:nvPr>
-        </p:nvSpPr>
-        <p:spPr>
-          <a:xfrm>
-            <a:off x="838200" y="365126"/>
-            <a:ext cx="10515600" cy="895264"/>
-          </a:xfrm>
-        </p:spPr>
-        <p:txBody>
-          <a:bodyPr/>
-          <a:lstStyle/>
-          <a:p>
-            <a:r>
-              <a:rPr lang="en-US">
-                <a:solidFill>
-                  <a:schemeClr val="bg2">
-                    <a:lumMod val="75000"/>
-                  </a:schemeClr>
-                </a:solidFill>
-              </a:rPr>
-              <a:t>How Does Data Pay In The US</a:t>
-            </a:r>
-            <a:endParaRPr lang="en-US" dirty="0">
-              <a:solidFill>
-                <a:schemeClr val="bg2">
-                  <a:lumMod val="75000"/>
-                </a:schemeClr>
-              </a:solidFill>
-            </a:endParaRPr>
-          </a:p>
-        </p:txBody>
-      </p:sp>
       <p:pic>
         <p:nvPicPr>
-          <p:cNvPr id="8" name="Content Placeholder 7">
-            <a:extLst>
-              <a:ext uri="{FF2B5EF4-FFF2-40B4-BE49-F238E27FC236}">
-                <a16:creationId xmlns:a16="http://schemas.microsoft.com/office/drawing/2014/main" id="{3F654773-B525-0407-F33D-311598C93735}"/>
+          <p:cNvPr id="6" name="Content Placeholder 5">
+            <a:extLst>
+              <a:ext uri="{FF2B5EF4-FFF2-40B4-BE49-F238E27FC236}">
+                <a16:creationId xmlns:a16="http://schemas.microsoft.com/office/drawing/2014/main" id="{4DFF0F48-A2E9-88B1-1A42-4C768387BCBC}"/>
               </a:ext>
             </a:extLst>
           </p:cNvPr>
@@ -3705,8 +3676,8 @@
         </p:blipFill>
         <p:spPr>
           <a:xfrm>
-            <a:off x="438235" y="1937980"/>
-            <a:ext cx="11315529" cy="4473581"/>
+            <a:off x="51361" y="400076"/>
+            <a:ext cx="12089278" cy="6057847"/>
           </a:xfrm>
           <a:prstGeom prst="rect">
             <a:avLst/>
@@ -3727,8 +3698,8 @@
         </p:nvSpPr>
         <p:spPr>
           <a:xfrm>
-            <a:off x="939452" y="1102290"/>
-            <a:ext cx="3732756" cy="646331"/>
+            <a:off x="6512312" y="400076"/>
+            <a:ext cx="4415731" cy="646331"/>
           </a:xfrm>
           <a:prstGeom prst="rect">
             <a:avLst/>
@@ -3749,7 +3720,17 @@
                   </a:schemeClr>
                 </a:solidFill>
               </a:rPr>
-              <a:t>National Distributions of Salaries for Data related roles</a:t>
+              <a:t>When compared, </a:t>
+            </a:r>
+            <a:r>
+              <a:rPr lang="en-US" b="1" dirty="0">
+                <a:solidFill>
+                  <a:schemeClr val="bg2">
+                    <a:lumMod val="75000"/>
+                  </a:schemeClr>
+                </a:solidFill>
+              </a:rPr>
+              <a:t>data roles pay higher than the national average.</a:t>
             </a:r>
           </a:p>
         </p:txBody>
@@ -3905,6 +3886,67 @@
           </a:p>
         </p:txBody>
       </p:sp>
+      <p:sp>
+        <p:nvSpPr>
+          <p:cNvPr id="2" name="TextBox 1">
+            <a:extLst>
+              <a:ext uri="{FF2B5EF4-FFF2-40B4-BE49-F238E27FC236}">
+                <a16:creationId xmlns:a16="http://schemas.microsoft.com/office/drawing/2014/main" id="{59A6378E-E355-AF17-C2C6-12BA0BDE3E46}"/>
+              </a:ext>
+            </a:extLst>
+          </p:cNvPr>
+          <p:cNvSpPr txBox="1"/>
+          <p:nvPr/>
+        </p:nvSpPr>
+        <p:spPr>
+          <a:xfrm>
+            <a:off x="5707079" y="5774567"/>
+            <a:ext cx="6095999" cy="923330"/>
+          </a:xfrm>
+          <a:prstGeom prst="rect">
+            <a:avLst/>
+          </a:prstGeom>
+          <a:noFill/>
+        </p:spPr>
+        <p:txBody>
+          <a:bodyPr wrap="square" rtlCol="0">
+            <a:spAutoFit/>
+          </a:bodyPr>
+          <a:lstStyle/>
+          <a:p>
+            <a:r>
+              <a:rPr lang="en-US" dirty="0">
+                <a:solidFill>
+                  <a:schemeClr val="bg2">
+                    <a:lumMod val="75000"/>
+                  </a:schemeClr>
+                </a:solidFill>
+              </a:rPr>
+              <a:t>Data Analytics and Data Science have </a:t>
+            </a:r>
+            <a:r>
+              <a:rPr lang="en-US" b="1" dirty="0">
+                <a:solidFill>
+                  <a:schemeClr val="bg2">
+                    <a:lumMod val="75000"/>
+                  </a:schemeClr>
+                </a:solidFill>
+              </a:rPr>
+              <a:t>a range of $50,000 and $70,000 each from the lowest paying to the highest paying state</a:t>
+            </a:r>
+            <a:r>
+              <a:rPr lang="en-US" dirty="0">
+                <a:solidFill>
+                  <a:schemeClr val="bg2">
+                    <a:lumMod val="75000"/>
+                  </a:schemeClr>
+                </a:solidFill>
+              </a:rPr>
+              <a:t>, on average.</a:t>
+            </a:r>
+          </a:p>
+        </p:txBody>
+      </p:sp>
     </p:spTree>
     <p:extLst>
       <p:ext uri="{BB962C8B-B14F-4D97-AF65-F5344CB8AC3E}">
@@ -4056,6 +4098,67 @@
           </a:p>
         </p:txBody>
       </p:sp>
+      <p:sp>
+        <p:nvSpPr>
+          <p:cNvPr id="2" name="TextBox 1">
+            <a:extLst>
+              <a:ext uri="{FF2B5EF4-FFF2-40B4-BE49-F238E27FC236}">
+                <a16:creationId xmlns:a16="http://schemas.microsoft.com/office/drawing/2014/main" id="{A957E660-CDEA-A7D7-099C-C02EE5B58D8C}"/>
+              </a:ext>
+            </a:extLst>
+          </p:cNvPr>
+          <p:cNvSpPr txBox="1"/>
+          <p:nvPr/>
+        </p:nvSpPr>
+        <p:spPr>
+          <a:xfrm>
+            <a:off x="5707079" y="5774567"/>
+            <a:ext cx="6095999" cy="923330"/>
+          </a:xfrm>
+          <a:prstGeom prst="rect">
+            <a:avLst/>
+          </a:prstGeom>
+          <a:noFill/>
+        </p:spPr>
+        <p:txBody>
+          <a:bodyPr wrap="square" rtlCol="0">
+            <a:spAutoFit/>
+          </a:bodyPr>
+          <a:lstStyle/>
+          <a:p>
+            <a:r>
+              <a:rPr lang="en-US" dirty="0">
+                <a:solidFill>
+                  <a:schemeClr val="bg2">
+                    <a:lumMod val="75000"/>
+                  </a:schemeClr>
+                </a:solidFill>
+              </a:rPr>
+              <a:t>Data Engineering and  ML/Advanced Research have </a:t>
+            </a:r>
+            <a:r>
+              <a:rPr lang="en-US" b="1" dirty="0">
+                <a:solidFill>
+                  <a:schemeClr val="bg2">
+                    <a:lumMod val="75000"/>
+                  </a:schemeClr>
+                </a:solidFill>
+              </a:rPr>
+              <a:t>a range of $70,000 and $120,000 each from the lowest paying to the highest paying state</a:t>
+            </a:r>
+            <a:r>
+              <a:rPr lang="en-US" dirty="0">
+                <a:solidFill>
+                  <a:schemeClr val="bg2">
+                    <a:lumMod val="75000"/>
+                  </a:schemeClr>
+                </a:solidFill>
+              </a:rPr>
+              <a:t>, on average.</a:t>
+            </a:r>
+          </a:p>
+        </p:txBody>
+      </p:sp>
     </p:spTree>
     <p:extLst>
       <p:ext uri="{BB962C8B-B14F-4D97-AF65-F5344CB8AC3E}">
@@ -4139,7 +4242,7 @@
         <p:spPr>
           <a:xfrm>
             <a:off x="890914" y="583307"/>
-            <a:ext cx="3732756" cy="923330"/>
+            <a:ext cx="5282780" cy="923330"/>
           </a:xfrm>
           <a:prstGeom prst="rect">
             <a:avLst/>
@@ -4160,8 +4263,45 @@
                   </a:schemeClr>
                 </a:solidFill>
               </a:rPr>
-              <a:t>Ratio of average data salary to mean salary of all occupations by state.</a:t>
-            </a:r>
+              <a:t>In all states</a:t>
+            </a:r>
+            <a:r>
+              <a:rPr lang="en-US" b="1" dirty="0">
+                <a:solidFill>
+                  <a:schemeClr val="bg2">
+                    <a:lumMod val="75000"/>
+                  </a:schemeClr>
+                </a:solidFill>
+              </a:rPr>
+              <a:t>,</a:t>
+            </a:r>
+            <a:r>
+              <a:rPr lang="en-US" dirty="0">
+                <a:solidFill>
+                  <a:schemeClr val="bg2">
+                    <a:lumMod val="75000"/>
+                  </a:schemeClr>
+                </a:solidFill>
+              </a:rPr>
+              <a:t> </a:t>
+            </a:r>
+            <a:r>
+              <a:rPr lang="en-US" b="1" dirty="0">
+                <a:solidFill>
+                  <a:schemeClr val="bg2">
+                    <a:lumMod val="75000"/>
+                  </a:schemeClr>
+                </a:solidFill>
+              </a:rPr>
+              <a:t>the data practitioner’s average salary is higher on average than the state’s average salary</a:t>
+            </a:r>
+            <a:endParaRPr lang="en-US" dirty="0">
+              <a:solidFill>
+                <a:schemeClr val="bg2">
+                  <a:lumMod val="75000"/>
+                </a:schemeClr>
+              </a:solidFill>
+            </a:endParaRPr>
           </a:p>
         </p:txBody>
       </p:sp>

--- a/story4/story4.pptx
+++ b/story4/story4.pptx
@@ -4242,7 +4242,7 @@
         <p:spPr>
           <a:xfrm>
             <a:off x="890914" y="583307"/>
-            <a:ext cx="5282780" cy="923330"/>
+            <a:ext cx="5282780" cy="646331"/>
           </a:xfrm>
           <a:prstGeom prst="rect">
             <a:avLst/>
@@ -4293,7 +4293,7 @@
                   </a:schemeClr>
                 </a:solidFill>
               </a:rPr>
-              <a:t>the data practitioner’s average salary is higher on average than the state’s average salary</a:t>
+              <a:t>the data practitioner’s average salary is higher than the state’s average salary</a:t>
             </a:r>
             <a:endParaRPr lang="en-US" dirty="0">
               <a:solidFill>

--- a/story4/story4.pptx
+++ b/story4/story4.pptx
@@ -264,7 +264,7 @@
           <a:p>
             <a:fld id="{7286FF3B-15B1-5941-9BD3-EA1D120FD011}" type="datetimeFigureOut">
               <a:rPr lang="en-US" smtClean="0"/>
-              <a:t>3/23/26</a:t>
+              <a:t>3/25/26</a:t>
             </a:fld>
             <a:endParaRPr lang="en-US"/>
           </a:p>
@@ -462,7 +462,7 @@
           <a:p>
             <a:fld id="{7286FF3B-15B1-5941-9BD3-EA1D120FD011}" type="datetimeFigureOut">
               <a:rPr lang="en-US" smtClean="0"/>
-              <a:t>3/23/26</a:t>
+              <a:t>3/25/26</a:t>
             </a:fld>
             <a:endParaRPr lang="en-US"/>
           </a:p>
@@ -670,7 +670,7 @@
           <a:p>
             <a:fld id="{7286FF3B-15B1-5941-9BD3-EA1D120FD011}" type="datetimeFigureOut">
               <a:rPr lang="en-US" smtClean="0"/>
-              <a:t>3/23/26</a:t>
+              <a:t>3/25/26</a:t>
             </a:fld>
             <a:endParaRPr lang="en-US"/>
           </a:p>
@@ -868,7 +868,7 @@
           <a:p>
             <a:fld id="{7286FF3B-15B1-5941-9BD3-EA1D120FD011}" type="datetimeFigureOut">
               <a:rPr lang="en-US" smtClean="0"/>
-              <a:t>3/23/26</a:t>
+              <a:t>3/25/26</a:t>
             </a:fld>
             <a:endParaRPr lang="en-US"/>
           </a:p>
@@ -1143,7 +1143,7 @@
           <a:p>
             <a:fld id="{7286FF3B-15B1-5941-9BD3-EA1D120FD011}" type="datetimeFigureOut">
               <a:rPr lang="en-US" smtClean="0"/>
-              <a:t>3/23/26</a:t>
+              <a:t>3/25/26</a:t>
             </a:fld>
             <a:endParaRPr lang="en-US"/>
           </a:p>
@@ -1408,7 +1408,7 @@
           <a:p>
             <a:fld id="{7286FF3B-15B1-5941-9BD3-EA1D120FD011}" type="datetimeFigureOut">
               <a:rPr lang="en-US" smtClean="0"/>
-              <a:t>3/23/26</a:t>
+              <a:t>3/25/26</a:t>
             </a:fld>
             <a:endParaRPr lang="en-US"/>
           </a:p>
@@ -1820,7 +1820,7 @@
           <a:p>
             <a:fld id="{7286FF3B-15B1-5941-9BD3-EA1D120FD011}" type="datetimeFigureOut">
               <a:rPr lang="en-US" smtClean="0"/>
-              <a:t>3/23/26</a:t>
+              <a:t>3/25/26</a:t>
             </a:fld>
             <a:endParaRPr lang="en-US"/>
           </a:p>
@@ -1961,7 +1961,7 @@
           <a:p>
             <a:fld id="{7286FF3B-15B1-5941-9BD3-EA1D120FD011}" type="datetimeFigureOut">
               <a:rPr lang="en-US" smtClean="0"/>
-              <a:t>3/23/26</a:t>
+              <a:t>3/25/26</a:t>
             </a:fld>
             <a:endParaRPr lang="en-US"/>
           </a:p>
@@ -2074,7 +2074,7 @@
           <a:p>
             <a:fld id="{7286FF3B-15B1-5941-9BD3-EA1D120FD011}" type="datetimeFigureOut">
               <a:rPr lang="en-US" smtClean="0"/>
-              <a:t>3/23/26</a:t>
+              <a:t>3/25/26</a:t>
             </a:fld>
             <a:endParaRPr lang="en-US"/>
           </a:p>
@@ -2385,7 +2385,7 @@
           <a:p>
             <a:fld id="{7286FF3B-15B1-5941-9BD3-EA1D120FD011}" type="datetimeFigureOut">
               <a:rPr lang="en-US" smtClean="0"/>
-              <a:t>3/23/26</a:t>
+              <a:t>3/25/26</a:t>
             </a:fld>
             <a:endParaRPr lang="en-US"/>
           </a:p>
@@ -2673,7 +2673,7 @@
           <a:p>
             <a:fld id="{7286FF3B-15B1-5941-9BD3-EA1D120FD011}" type="datetimeFigureOut">
               <a:rPr lang="en-US" smtClean="0"/>
-              <a:t>3/23/26</a:t>
+              <a:t>3/25/26</a:t>
             </a:fld>
             <a:endParaRPr lang="en-US"/>
           </a:p>
@@ -2914,7 +2914,7 @@
           <a:p>
             <a:fld id="{7286FF3B-15B1-5941-9BD3-EA1D120FD011}" type="datetimeFigureOut">
               <a:rPr lang="en-US" smtClean="0"/>
-              <a:t>3/23/26</a:t>
+              <a:t>3/25/26</a:t>
             </a:fld>
             <a:endParaRPr lang="en-US"/>
           </a:p>
@@ -3579,8 +3579,8 @@
         </p:nvSpPr>
         <p:spPr>
           <a:xfrm>
-            <a:off x="388472" y="3231349"/>
-            <a:ext cx="4081928" cy="2031325"/>
+            <a:off x="397436" y="2251923"/>
+            <a:ext cx="4081928" cy="2862322"/>
           </a:xfrm>
           <a:prstGeom prst="rect">
             <a:avLst/>
@@ -3611,7 +3611,84 @@
                   </a:schemeClr>
                 </a:solidFill>
               </a:rPr>
-              <a:t>to four data related job categories: Data Analytics, Data Science, Data Engineering, and Machine Learning/Advanced Research.</a:t>
+              <a:t>to four data related job categories: </a:t>
+            </a:r>
+          </a:p>
+          <a:p>
+            <a:pPr marL="285750" indent="-285750">
+              <a:buFont typeface="Arial" panose="020B0604020202020204" pitchFamily="34" charset="0"/>
+              <a:buChar char="•"/>
+            </a:pPr>
+            <a:endParaRPr lang="en-US" b="1" dirty="0">
+              <a:solidFill>
+                <a:schemeClr val="bg2">
+                  <a:lumMod val="75000"/>
+                </a:schemeClr>
+              </a:solidFill>
+            </a:endParaRPr>
+          </a:p>
+          <a:p>
+            <a:pPr marL="285750" indent="-285750">
+              <a:buFont typeface="Arial" panose="020B0604020202020204" pitchFamily="34" charset="0"/>
+              <a:buChar char="•"/>
+            </a:pPr>
+            <a:r>
+              <a:rPr lang="en-US" b="1" dirty="0">
+                <a:solidFill>
+                  <a:schemeClr val="bg2">
+                    <a:lumMod val="75000"/>
+                  </a:schemeClr>
+                </a:solidFill>
+              </a:rPr>
+              <a:t>Data Analytics</a:t>
+            </a:r>
+          </a:p>
+          <a:p>
+            <a:pPr marL="285750" indent="-285750">
+              <a:buFont typeface="Arial" panose="020B0604020202020204" pitchFamily="34" charset="0"/>
+              <a:buChar char="•"/>
+            </a:pPr>
+            <a:r>
+              <a:rPr lang="en-US" b="1" dirty="0">
+                <a:solidFill>
+                  <a:schemeClr val="bg2">
+                    <a:lumMod val="75000"/>
+                  </a:schemeClr>
+                </a:solidFill>
+              </a:rPr>
+              <a:t>Data Science</a:t>
+            </a:r>
+          </a:p>
+          <a:p>
+            <a:pPr marL="285750" indent="-285750">
+              <a:buFont typeface="Arial" panose="020B0604020202020204" pitchFamily="34" charset="0"/>
+              <a:buChar char="•"/>
+            </a:pPr>
+            <a:r>
+              <a:rPr lang="en-US" b="1" dirty="0">
+                <a:solidFill>
+                  <a:schemeClr val="bg2">
+                    <a:lumMod val="75000"/>
+                  </a:schemeClr>
+                </a:solidFill>
+              </a:rPr>
+              <a:t>Data Engineering</a:t>
+            </a:r>
+          </a:p>
+          <a:p>
+            <a:pPr marL="285750" indent="-285750">
+              <a:buFont typeface="Arial" panose="020B0604020202020204" pitchFamily="34" charset="0"/>
+              <a:buChar char="•"/>
+            </a:pPr>
+            <a:r>
+              <a:rPr lang="en-US" b="1" dirty="0">
+                <a:solidFill>
+                  <a:schemeClr val="bg2">
+                    <a:lumMod val="75000"/>
+                  </a:schemeClr>
+                </a:solidFill>
+              </a:rPr>
+              <a:t>Machine Learning/Advanced Research.</a:t>
             </a:r>
           </a:p>
         </p:txBody>
